--- a/catalog/samples/chevron_value_chain.pptx
+++ b/catalog/samples/chevron_value_chain.pptx
@@ -2172,7 +2172,7 @@
           </a:p>
           <a:p>
             <a:r>
-              <a:t>  "template_sha256": "0ad17efc64550b514ff9b82bb5f03b4e45ada8965d33542786c4d469ab1ec0f6"</a:t>
+              <a:t>  "template_sha256": "f1ed0175ef4a17d261818be1484ea45f66abd7464bd9392b9a23620f5ee5118f"</a:t>
             </a:r>
           </a:p>
           <a:p>
